--- a/3-Master_Plan/re_entry/HEROs_and_PASSes/slides/auto/CHAR_PD22_ppm_full_vs_filtered_AUTO.pptx
+++ b/3-Master_Plan/re_entry/HEROs_and_PASSes/slides/auto/CHAR_PD22_ppm_full_vs_filtered_AUTO.pptx
@@ -3252,7 +3252,7 @@
               <a:rPr sz="1000" b="0" i="0" baseline="0">
                 <a:latin typeface="Calibri"/>
               </a:rPr>
-              <a:t>  Panel: 2011-2021 MBB · gray $n \approx$ $52,232$ · blue $n =$ $5,926$ · $7,051$ zero-min rows excluded (PPM undefined).</a:t>
+              <a:t>  Panel: 2011-2021 MBB · gray $n \approx 52,232$ · blue $n = 5,926$ · $7,051$ zero-min rows excluded (PPM undefined).</a:t>
             </a:r>
           </a:p>
           <a:p>
@@ -3292,7 +3292,7 @@
               <a:rPr sz="1000" b="0" i="0" baseline="0">
                 <a:latin typeface="Calibri"/>
               </a:rPr>
-              <a:t>  After min-20 drop: hero panel $n =$ $46,306$; raw PPM median = $0.308$ (p99 = $0.62$).</a:t>
+              <a:t>  After min-20 drop: hero panel $n = 46,306$; raw PPM median = $0.308$ (p99 = $0.62$).</a:t>
             </a:r>
           </a:p>
           <a:p>
@@ -3384,7 +3384,7 @@
               <a:rPr sz="1100" b="1" i="0" baseline="0">
                 <a:latin typeface="Calibri"/>
               </a:rPr>
-              <a:t>Claim (PD22): Sub-20-min rows add PPM noise ($327$ with PPM $&gt; 1$, max $6$) on top of a rotation-player cloud — minutes floor cleans ability before hero / ASSIGN; empirical roster caps count season contributors, not NCAA dress-out $15$.</a:t>
+              <a:t>Claim (PD22): Sub-20-min rows add PPM noise ($103$ with PPM $&gt; 1$, max $6.00$) on top of a rotation-player cloud — minutes floor cleans ability before hero / ASSIGN; empirical roster caps count season contributors, not NCAA dress-out $15$.</a:t>
             </a:r>
           </a:p>
         </p:txBody>
